--- a/T9981_VIT CHENNAI_SWETHA.pptx
+++ b/T9981_VIT CHENNAI_SWETHA.pptx
@@ -744,7 +744,7 @@
           <a:bodyPr/>
           <a:lstStyle/>
           <a:p>
-            <a:endParaRPr lang="en-IN" dirty="0"/>
+            <a:endParaRPr lang="en-IN" baseline="-25000" dirty="0"/>
           </a:p>
         </p:txBody>
       </p:sp>
@@ -6689,8 +6689,8 @@
         </p:nvSpPr>
         <p:spPr>
           <a:xfrm>
-            <a:off x="123988" y="1010244"/>
-            <a:ext cx="5961678" cy="5847755"/>
+            <a:off x="123988" y="1010245"/>
+            <a:ext cx="5961678" cy="5654028"/>
           </a:xfrm>
           <a:prstGeom prst="rect">
             <a:avLst/>
@@ -6740,8 +6740,8 @@
         </p:nvSpPr>
         <p:spPr>
           <a:xfrm>
-            <a:off x="237641" y="1176218"/>
-            <a:ext cx="5858359" cy="5515806"/>
+            <a:off x="203739" y="1010245"/>
+            <a:ext cx="5858359" cy="5654028"/>
           </a:xfrm>
           <a:prstGeom prst="rect">
             <a:avLst/>
@@ -7102,7 +7102,7 @@
         <p:spPr>
           <a:xfrm>
             <a:off x="6209654" y="1010244"/>
-            <a:ext cx="5961678" cy="5847755"/>
+            <a:ext cx="5858358" cy="5654027"/>
           </a:xfrm>
           <a:prstGeom prst="rect">
             <a:avLst/>
@@ -7150,7 +7150,7 @@
         </p:nvSpPr>
         <p:spPr>
           <a:xfrm>
-            <a:off x="6238067" y="1215344"/>
+            <a:off x="6277459" y="1010245"/>
             <a:ext cx="5829945" cy="5847755"/>
           </a:xfrm>
           <a:prstGeom prst="rect">
